--- a/output/SS_Generic_Bags.pptx
+++ b/output/SS_Generic_Bags.pptx
@@ -9887,7 +9887,7 @@
                           <a:cs typeface="Inter"/>
                           <a:sym typeface="Inter"/>
                         </a:rPr>
-                        <a:t>waterproof, laptop sleeve, USB port, anti-theft, backpack under 3000</a:t>
+                        <a:t>waterproof, laptop sleeve, USB port, anti-theft, backpack, within budget</a:t>
                       </a:r>
                       <a:endParaRPr sz="1000" u="none" cap="none" strike="noStrike">
                         <a:latin typeface="Inter"/>
@@ -13768,7 +13768,7 @@
                 <a:cs typeface="Inter"/>
                 <a:sym typeface="Inter"/>
               </a:rPr>
-              <a:t>What an AI Shopping Assistant changes :  “I need a waterproof laptop backpack with USB charging port, anti-theft zippers, and a trolley sleeve under 3000”</a:t>
+              <a:t>What an AI Shopping Assistant changes :  “I need a waterproof laptop backpack with USB charging port, anti-theft zippers, and a trolley sleeve, within budget”</a:t>
             </a:r>
             <a:endParaRPr b="0" i="0" sz="1100" u="none" cap="none" strike="noStrike">
               <a:solidFill>
@@ -14657,7 +14657,7 @@
                 <a:cs typeface="Inter"/>
                 <a:sym typeface="Inter"/>
               </a:rPr>
-              <a:t>Unlike traditional search bars that only cater to keyword matching for direct queries like “tan leather tote” or “crossbody with bottle pocket”, AI chat assistants need to answer intent based queries like “I need a bag for gym and work” or “I want a carry-on that fits my 15-inch laptop”. They have to map buyer intent to keywords using a knowledge graph and then search the catalog for relevant products using keywords, refer to the diagram in the next slide for an example</a:t>
+              <a:t>Unlike traditional search bars that only cater to keyword matching for direct queries like “tan leather tote” or “crossbody with bottle pocket”, AI chat assistants need to answer intent based queries like “I need a bag for gym and work” or “I want a carry-on that fits my 15-inch laptop”. They have to map buyer intent to keywords using a knowledge graph and then search the catalog for relevant products using keywords, refer to the diagram on slide 11 for an example</a:t>
             </a:r>
             <a:endParaRPr b="0" i="0" sz="1200" u="none" cap="none" strike="noStrike">
               <a:solidFill>

--- a/output/SS_Generic_Bags.pptx
+++ b/output/SS_Generic_Bags.pptx
@@ -13935,16 +13935,17 @@
       </p:sp>
       <p:pic>
         <p:nvPicPr>
-          <p:cNvPr id="59" name="Google Shape;59;p4" title="Screenshot 2026-04-14 at 9.08.05 PM.png"/>
-          <p:cNvPicPr preferRelativeResize="0"/>
+          <p:cNvPr id="59" name="Picture 58" descr="bags_table.png"/>
+          <p:cNvPicPr>
+            <a:picLocks noChangeAspect="1"/>
+          </p:cNvPicPr>
           <p:nvPr/>
         </p:nvPicPr>
-        <p:blipFill rotWithShape="1">
-          <a:blip r:embed="rId3">
-            <a:alphaModFix/>
-          </a:blip>
-          <a:srcRect b="0" l="0" r="0" t="0"/>
-          <a:stretch/>
+        <p:blipFill>
+          <a:blip r:embed="rId4"/>
+          <a:stretch>
+            <a:fillRect/>
+          </a:stretch>
         </p:blipFill>
         <p:spPr>
           <a:xfrm>
@@ -13954,10 +13955,6 @@
           <a:prstGeom prst="rect">
             <a:avLst/>
           </a:prstGeom>
-          <a:noFill/>
-          <a:ln>
-            <a:noFill/>
-          </a:ln>
         </p:spPr>
       </p:pic>
     </p:spTree>

--- a/output/SS_Generic_Bags.pptx
+++ b/output/SS_Generic_Bags.pptx
@@ -6259,7 +6259,7 @@
                 <a:cs typeface="Inter"/>
                 <a:sym typeface="Inter"/>
               </a:rPr>
-              <a:t>An AI shopping assistant doesn't just search — it sells</a:t>
+              <a:t>Your AI sales associate doesn't just search — it sells</a:t>
             </a:r>
             <a:endParaRPr b="0" i="0" sz="2300" u="none" cap="none" strike="noStrike">
               <a:solidFill>
@@ -6450,7 +6450,7 @@
                 <a:cs typeface="Inter"/>
                 <a:sym typeface="Inter"/>
               </a:rPr>
-              <a:t>Clarifies intent instead of dumping a catalog — asks the right follow-up questions (occasion, budget, use-case, size/fit) before suggesting anything.</a:t>
+              <a:t>Like your best sales associate, it clarifies intent instead of dumping a catalog — asks the right follow-up questions (occasion, budget, use-case, size/fit) before suggesting anything.</a:t>
             </a:r>
             <a:endParaRPr b="0" i="0" sz="1100" u="none" cap="none" strike="noStrike">
               <a:solidFill>
@@ -13768,7 +13768,7 @@
                 <a:cs typeface="Inter"/>
                 <a:sym typeface="Inter"/>
               </a:rPr>
-              <a:t>What an AI Shopping Assistant changes :  “I need a waterproof laptop backpack with USB charging port, anti-theft zippers, and a trolley sleeve, within budget”</a:t>
+              <a:t>What an AI Sales Associate changes :  “I need a waterproof laptop backpack with USB charging port, anti-theft zippers, and a trolley sleeve, within budget”</a:t>
             </a:r>
             <a:endParaRPr b="0" i="0" sz="1100" u="none" cap="none" strike="noStrike">
               <a:solidFill>
@@ -13808,7 +13808,7 @@
                 <a:cs typeface="Inter"/>
                 <a:sym typeface="Inter"/>
               </a:rPr>
-              <a:t>An AI shopping assistant powered by a knowledge graph understands intent + constraints + context, it maps waterproof to material/coating, USB port to tech-enabled, trolley sleeve to travel-compatible, adds the conditions for price and returns relevant products from the catalog - exactly what the shopper means and wants, not just what they typed.</a:t>
+              <a:t>An AI sales associate powered by a knowledge graph understands intent + constraints + context, it maps waterproof to material/coating, USB port to tech-enabled, trolley sleeve to travel-compatible, adds the conditions for price and returns relevant products from the catalog - exactly what the shopper means and wants, not just what they typed.</a:t>
             </a:r>
             <a:endParaRPr b="0" i="0" sz="1100" u="none" cap="none" strike="noStrike">
               <a:solidFill>
@@ -15986,7 +15986,7 @@
                 <a:cs typeface="Inter"/>
                 <a:sym typeface="Inter"/>
               </a:rPr>
-              <a:t>AI Shopping Assistant on Website that can understand user intent</a:t>
+              <a:t>AI Sales Associate on your website that guides buyers to the right purchase</a:t>
             </a:r>
             <a:endParaRPr b="0" i="0" sz="1600" u="none" cap="none" strike="noStrike">
               <a:solidFill>
@@ -16052,7 +16052,7 @@
                 <a:cs typeface="Inter"/>
                 <a:sym typeface="Inter"/>
               </a:rPr>
-              <a:t>Chat-based shopping: voice, image, and text input</a:t>
+              <a:t>Acts as a digital sales associate — asks the right questions, understands what the buyer actually needs, and guides them to the right product</a:t>
             </a:r>
             <a:endParaRPr b="0" i="0" sz="1300" u="none" cap="none" strike="noStrike">
               <a:solidFill>
@@ -16092,7 +16092,7 @@
                 <a:cs typeface="Inter"/>
                 <a:sym typeface="Inter"/>
               </a:rPr>
-              <a:t>Lower cost per query - Graph handles 90%+ of queries, LLM tokens only for edge cases</a:t>
+              <a:t>Drives revenue, not just answers — every conversation is a guided selling opportunity that converts browsers into buyers</a:t>
             </a:r>
             <a:endParaRPr b="0" i="0" sz="1300" u="none" cap="none" strike="noStrike">
               <a:solidFill>
@@ -16132,7 +16132,7 @@
                 <a:cs typeface="Inter"/>
                 <a:sym typeface="Inter"/>
               </a:rPr>
-              <a:t>All intent based queries such as “carry-on for a 2-week Europe trip”, “bag for gym clothes and work laptop” handled just like in ChatGPT and Amazon Rufus, giving buyer a full conversational experience.</a:t>
+              <a:t>All intent based queries such as “carry-on for a 2-week Europe trip”, “bag for gym clothes and work laptop” handled just like in ChatGPT and Amazon Rufus, guiding buyers to a purchase just like your best in-store sales associate would.</a:t>
             </a:r>
             <a:endParaRPr b="0" i="0" sz="1300" u="none" cap="none" strike="noStrike">
               <a:solidFill>

--- a/output/SS_Generic_Bags.pptx
+++ b/output/SS_Generic_Bags.pptx
@@ -4875,7 +4875,7 @@
                 <a:cs typeface="Inter"/>
                 <a:sym typeface="Inter"/>
               </a:rPr>
-              <a:t>Conversational AI shopping assistants for for e-commerce websites</a:t>
+              <a:t>Conversational AI shopping assistants for e-commerce websites</a:t>
             </a:r>
             <a:endParaRPr b="0" i="0" sz="1600" u="none" cap="none" strike="noStrike">
               <a:solidFill>
@@ -6450,7 +6450,7 @@
                 <a:cs typeface="Inter"/>
                 <a:sym typeface="Inter"/>
               </a:rPr>
-              <a:t>Like your best sales associate, it clarifies intent instead of dumping a catalog — asks the right follow-up questions (occasion, budget, use-case, size/fit) before suggesting anything.</a:t>
+              <a:t>Like your best sales associate, it clarifies intent instead of dumping a catalog — asks the right follow-up questions (occasion, budget, use-case, dimensions/capacity) before suggesting anything.</a:t>
             </a:r>
             <a:endParaRPr b="0" i="0" sz="1100" u="none" cap="none" strike="noStrike">
               <a:solidFill>
@@ -6655,7 +6655,7 @@
                 <a:cs typeface="Inter"/>
                 <a:sym typeface="Inter"/>
               </a:rPr>
-              <a:t>Stylist-grade cross-sell → AOV lift</a:t>
+              <a:t>Travel-kit cross-sell → AOV lift</a:t>
             </a:r>
             <a:endParaRPr b="0" i="0" u="none" cap="none" strike="noStrike">
               <a:solidFill>
@@ -10467,7 +10467,7 @@
                 <a:cs typeface="Inter"/>
                 <a:sym typeface="Inter"/>
               </a:rPr>
-              <a:t>We can run a full 500-query audit on your site in under a week and show you exactly where you are losing crores in revenue..</a:t>
+              <a:t>We can run a full 500-query audit on your site in under a week and show you exactly where you are losing crores in revenue.</a:t>
             </a:r>
             <a:endParaRPr b="0" i="0" sz="1500" u="none" cap="none" strike="noStrike">
               <a:solidFill>
@@ -14397,7 +14397,7 @@
                 <a:cs typeface="Inter"/>
                 <a:sym typeface="Inter"/>
               </a:rPr>
-              <a:t>Catalogs today don't expose attributes such as material/closure and tags such as “waterproof” or “anti-theft” which an AI agent needs to map intent such as “bag for a European backpacking trip”  to “anti-theft sling bag” or “that fits IndiGo cabin limits” to “waterproof laptop backpack”.</a:t>
+              <a:t>Catalogs today don't expose attributes such as material/closure and tags such as “waterproof” or “anti-theft” which an AI agent needs to map intent such as “bag for a European backpacking trip”  to “anti-theft sling bag” or “that fits IndiGo cabin limits” to “airline-compliant carry-on”.</a:t>
             </a:r>
             <a:endParaRPr b="0" i="0" sz="1200" u="none" cap="none" strike="noStrike">
               <a:solidFill>
@@ -16773,7 +16773,7 @@
             </a:pPr>
             <a:r>
               <a:rPr b="1" lang="en-US" sz="2000"/>
-              <a:t>The future of e-commerce - shopping assistants, virtual try-on, multilingual queries and discovery through apps on LLM platforms.</a:t>
+              <a:t>The future of e-commerce - shopping assistants, AR size visualization, multilingual queries and discovery through apps on LLM platforms.</a:t>
             </a:r>
             <a:endParaRPr b="1" sz="2000"/>
           </a:p>
@@ -16815,15 +16815,7 @@
             </a:pPr>
             <a:r>
               <a:rPr lang="en-US"/>
-              <a:t xml:space="preserve">Buyers today are increasingly looking for virtual try-on to make more informed </a:t>
-            </a:r>
-            <a:r>
-              <a:rPr lang="en-US"/>
-              <a:t>decisions</a:t>
-            </a:r>
-            <a:r>
-              <a:rPr lang="en-US"/>
-              <a:t>.</a:t>
+              <a:t xml:space="preserve">Buyers today are increasingly looking for AR size visualization to make more informed decisions.</a:t>
             </a:r>
             <a:endParaRPr/>
           </a:p>
